--- a/преза.pptx
+++ b/преза.pptx
@@ -15,7 +15,7 @@
     <p:sldId id="261" r:id="rId6"/>
     <p:sldId id="262" r:id="rId7"/>
     <p:sldId id="263" r:id="rId8"/>
-    <p:sldId id="264" r:id="rId9"/>
+    <p:sldId id="275" r:id="rId9"/>
     <p:sldId id="268" r:id="rId10"/>
     <p:sldId id="272" r:id="rId11"/>
     <p:sldId id="269" r:id="rId12"/>
@@ -213,7 +213,7 @@
           <a:p>
             <a:fld id="{0532DB98-C80A-491A-B0EB-ACC58FF0CAE4}" type="datetimeFigureOut">
               <a:rPr lang="en-US" smtClean="0"/>
-              <a:t>3/11/2026</a:t>
+              <a:t>3/31/2026</a:t>
             </a:fld>
             <a:endParaRPr lang="en-US"/>
           </a:p>
@@ -923,7 +923,7 @@
           <a:p>
             <a:fld id="{5368AA8D-6ECF-453B-9B6B-12457D7294EB}" type="datetimeFigureOut">
               <a:rPr lang="en-US" smtClean="0"/>
-              <a:t>3/11/2026</a:t>
+              <a:t>3/31/2026</a:t>
             </a:fld>
             <a:endParaRPr lang="en-US"/>
           </a:p>
@@ -1123,7 +1123,7 @@
           <a:p>
             <a:fld id="{5368AA8D-6ECF-453B-9B6B-12457D7294EB}" type="datetimeFigureOut">
               <a:rPr lang="en-US" smtClean="0"/>
-              <a:t>3/11/2026</a:t>
+              <a:t>3/31/2026</a:t>
             </a:fld>
             <a:endParaRPr lang="en-US"/>
           </a:p>
@@ -1333,7 +1333,7 @@
           <a:p>
             <a:fld id="{5368AA8D-6ECF-453B-9B6B-12457D7294EB}" type="datetimeFigureOut">
               <a:rPr lang="en-US" smtClean="0"/>
-              <a:t>3/11/2026</a:t>
+              <a:t>3/31/2026</a:t>
             </a:fld>
             <a:endParaRPr lang="en-US"/>
           </a:p>
@@ -1533,7 +1533,7 @@
           <a:p>
             <a:fld id="{5368AA8D-6ECF-453B-9B6B-12457D7294EB}" type="datetimeFigureOut">
               <a:rPr lang="en-US" smtClean="0"/>
-              <a:t>3/11/2026</a:t>
+              <a:t>3/31/2026</a:t>
             </a:fld>
             <a:endParaRPr lang="en-US"/>
           </a:p>
@@ -1809,7 +1809,7 @@
           <a:p>
             <a:fld id="{5368AA8D-6ECF-453B-9B6B-12457D7294EB}" type="datetimeFigureOut">
               <a:rPr lang="en-US" smtClean="0"/>
-              <a:t>3/11/2026</a:t>
+              <a:t>3/31/2026</a:t>
             </a:fld>
             <a:endParaRPr lang="en-US"/>
           </a:p>
@@ -2077,7 +2077,7 @@
           <a:p>
             <a:fld id="{5368AA8D-6ECF-453B-9B6B-12457D7294EB}" type="datetimeFigureOut">
               <a:rPr lang="en-US" smtClean="0"/>
-              <a:t>3/11/2026</a:t>
+              <a:t>3/31/2026</a:t>
             </a:fld>
             <a:endParaRPr lang="en-US"/>
           </a:p>
@@ -2492,7 +2492,7 @@
           <a:p>
             <a:fld id="{5368AA8D-6ECF-453B-9B6B-12457D7294EB}" type="datetimeFigureOut">
               <a:rPr lang="en-US" smtClean="0"/>
-              <a:t>3/11/2026</a:t>
+              <a:t>3/31/2026</a:t>
             </a:fld>
             <a:endParaRPr lang="en-US"/>
           </a:p>
@@ -2634,7 +2634,7 @@
           <a:p>
             <a:fld id="{5368AA8D-6ECF-453B-9B6B-12457D7294EB}" type="datetimeFigureOut">
               <a:rPr lang="en-US" smtClean="0"/>
-              <a:t>3/11/2026</a:t>
+              <a:t>3/31/2026</a:t>
             </a:fld>
             <a:endParaRPr lang="en-US"/>
           </a:p>
@@ -2747,7 +2747,7 @@
           <a:p>
             <a:fld id="{5368AA8D-6ECF-453B-9B6B-12457D7294EB}" type="datetimeFigureOut">
               <a:rPr lang="en-US" smtClean="0"/>
-              <a:t>3/11/2026</a:t>
+              <a:t>3/31/2026</a:t>
             </a:fld>
             <a:endParaRPr lang="en-US"/>
           </a:p>
@@ -3060,7 +3060,7 @@
           <a:p>
             <a:fld id="{5368AA8D-6ECF-453B-9B6B-12457D7294EB}" type="datetimeFigureOut">
               <a:rPr lang="en-US" smtClean="0"/>
-              <a:t>3/11/2026</a:t>
+              <a:t>3/31/2026</a:t>
             </a:fld>
             <a:endParaRPr lang="en-US"/>
           </a:p>
@@ -3349,7 +3349,7 @@
           <a:p>
             <a:fld id="{5368AA8D-6ECF-453B-9B6B-12457D7294EB}" type="datetimeFigureOut">
               <a:rPr lang="en-US" smtClean="0"/>
-              <a:t>3/11/2026</a:t>
+              <a:t>3/31/2026</a:t>
             </a:fld>
             <a:endParaRPr lang="en-US"/>
           </a:p>
@@ -3592,7 +3592,7 @@
           <a:p>
             <a:fld id="{5368AA8D-6ECF-453B-9B6B-12457D7294EB}" type="datetimeFigureOut">
               <a:rPr lang="en-US" smtClean="0"/>
-              <a:t>3/11/2026</a:t>
+              <a:t>3/31/2026</a:t>
             </a:fld>
             <a:endParaRPr lang="en-US"/>
           </a:p>
@@ -12420,10 +12420,10 @@
           <p:nvPr/>
         </p:nvPicPr>
         <p:blipFill>
-          <a:blip r:embed="rId3">
+          <a:blip>
             <a:extLst>
               <a:ext uri="{96DAC541-7B7A-43D3-8B79-37D633B846F1}">
-                <asvg:svgBlip xmlns:asvg="http://schemas.microsoft.com/office/drawing/2016/SVG/main" r:embed="rId4"/>
+                <asvg:svgBlip xmlns:asvg="http://schemas.microsoft.com/office/drawing/2016/SVG/main" r:embed="rId3"/>
               </a:ext>
             </a:extLst>
           </a:blip>
@@ -12456,10 +12456,10 @@
           <p:nvPr/>
         </p:nvPicPr>
         <p:blipFill>
-          <a:blip r:embed="rId5">
+          <a:blip>
             <a:extLst>
               <a:ext uri="{96DAC541-7B7A-43D3-8B79-37D633B846F1}">
-                <asvg:svgBlip xmlns:asvg="http://schemas.microsoft.com/office/drawing/2016/SVG/main" r:embed="rId6"/>
+                <asvg:svgBlip xmlns:asvg="http://schemas.microsoft.com/office/drawing/2016/SVG/main" r:embed="rId4"/>
               </a:ext>
             </a:extLst>
           </a:blip>
@@ -13524,10 +13524,10 @@
           <p:nvPr/>
         </p:nvPicPr>
         <p:blipFill>
-          <a:blip r:embed="rId3">
+          <a:blip>
             <a:extLst>
               <a:ext uri="{96DAC541-7B7A-43D3-8B79-37D633B846F1}">
-                <asvg:svgBlip xmlns:asvg="http://schemas.microsoft.com/office/drawing/2016/SVG/main" r:embed="rId4"/>
+                <asvg:svgBlip xmlns:asvg="http://schemas.microsoft.com/office/drawing/2016/SVG/main" r:embed="rId3"/>
               </a:ext>
             </a:extLst>
           </a:blip>
@@ -14738,10 +14738,10 @@
           <p:nvPr/>
         </p:nvPicPr>
         <p:blipFill>
-          <a:blip r:embed="rId2">
+          <a:blip>
             <a:extLst>
               <a:ext uri="{96DAC541-7B7A-43D3-8B79-37D633B846F1}">
-                <asvg:svgBlip xmlns:asvg="http://schemas.microsoft.com/office/drawing/2016/SVG/main" r:embed="rId3"/>
+                <asvg:svgBlip xmlns:asvg="http://schemas.microsoft.com/office/drawing/2016/SVG/main" r:embed="rId2"/>
               </a:ext>
             </a:extLst>
           </a:blip>
@@ -15194,10 +15194,10 @@
           <p:nvPr/>
         </p:nvPicPr>
         <p:blipFill>
-          <a:blip r:embed="rId4">
+          <a:blip>
             <a:extLst>
               <a:ext uri="{96DAC541-7B7A-43D3-8B79-37D633B846F1}">
-                <asvg:svgBlip xmlns:asvg="http://schemas.microsoft.com/office/drawing/2016/SVG/main" r:embed="rId5"/>
+                <asvg:svgBlip xmlns:asvg="http://schemas.microsoft.com/office/drawing/2016/SVG/main" r:embed="rId3"/>
               </a:ext>
             </a:extLst>
           </a:blip>
@@ -16029,10 +16029,10 @@
       </p:grpSpPr>
       <p:sp>
         <p:nvSpPr>
-          <p:cNvPr id="2" name="TextBox 1">
-            <a:extLst>
-              <a:ext uri="{FF2B5EF4-FFF2-40B4-BE49-F238E27FC236}">
-                <a16:creationId xmlns:a16="http://schemas.microsoft.com/office/drawing/2014/main" id="{BCEA45CF-938C-19FE-746B-00340EC79D97}"/>
+          <p:cNvPr id="3" name="TextBox 2">
+            <a:extLst>
+              <a:ext uri="{FF2B5EF4-FFF2-40B4-BE49-F238E27FC236}">
+                <a16:creationId xmlns:a16="http://schemas.microsoft.com/office/drawing/2014/main" id="{CAC8320F-887E-D4CB-0991-56A090C03877}"/>
               </a:ext>
             </a:extLst>
           </p:cNvPr>
@@ -16041,8 +16041,8 @@
         </p:nvSpPr>
         <p:spPr>
           <a:xfrm>
-            <a:off x="2139895" y="2551837"/>
-            <a:ext cx="7912210" cy="1754326"/>
+            <a:off x="4019951" y="434993"/>
+            <a:ext cx="4152099" cy="461665"/>
           </a:xfrm>
           <a:prstGeom prst="rect">
             <a:avLst/>
@@ -16050,27 +16050,426 @@
           <a:noFill/>
         </p:spPr>
         <p:txBody>
-          <a:bodyPr wrap="square" rtlCol="0">
+          <a:bodyPr wrap="none" rtlCol="0">
             <a:spAutoFit/>
           </a:bodyPr>
           <a:lstStyle/>
           <a:p>
+            <a:r>
+              <a:rPr lang="ru-RU" sz="2400" b="1" dirty="0">
+                <a:latin typeface="Cascadia Mono" panose="020B0609020000020004" pitchFamily="49" charset="0"/>
+                <a:cs typeface="Cascadia Mono" panose="020B0609020000020004" pitchFamily="49" charset="0"/>
+              </a:rPr>
+              <a:t>Архитектура приложения</a:t>
+            </a:r>
+            <a:endParaRPr lang="en-US" sz="2400" b="1" dirty="0">
+              <a:latin typeface="Cascadia Mono" panose="020B0609020000020004" pitchFamily="49" charset="0"/>
+              <a:cs typeface="Cascadia Mono" panose="020B0609020000020004" pitchFamily="49" charset="0"/>
+            </a:endParaRPr>
+          </a:p>
+        </p:txBody>
+      </p:sp>
+      <p:sp>
+        <p:nvSpPr>
+          <p:cNvPr id="4" name="Овал 3">
+            <a:extLst>
+              <a:ext uri="{FF2B5EF4-FFF2-40B4-BE49-F238E27FC236}">
+                <a16:creationId xmlns:a16="http://schemas.microsoft.com/office/drawing/2014/main" id="{8DEEC275-8F25-3F83-ADD8-EAF7906196A9}"/>
+              </a:ext>
+            </a:extLst>
+          </p:cNvPr>
+          <p:cNvSpPr/>
+          <p:nvPr/>
+        </p:nvSpPr>
+        <p:spPr>
+          <a:xfrm>
+            <a:off x="7843627" y="1742654"/>
+            <a:ext cx="3364992" cy="3364992"/>
+          </a:xfrm>
+          <a:prstGeom prst="ellipse">
+            <a:avLst/>
+          </a:prstGeom>
+          <a:solidFill>
+            <a:srgbClr val="2EB000"/>
+          </a:solidFill>
+          <a:ln w="15875">
+            <a:solidFill>
+              <a:schemeClr val="tx1"/>
+            </a:solidFill>
+          </a:ln>
+        </p:spPr>
+        <p:style>
+          <a:lnRef idx="2">
+            <a:schemeClr val="accent1">
+              <a:shade val="15000"/>
+            </a:schemeClr>
+          </a:lnRef>
+          <a:fillRef idx="1">
+            <a:schemeClr val="accent1"/>
+          </a:fillRef>
+          <a:effectRef idx="0">
+            <a:schemeClr val="accent1"/>
+          </a:effectRef>
+          <a:fontRef idx="minor">
+            <a:schemeClr val="lt1"/>
+          </a:fontRef>
+        </p:style>
+        <p:txBody>
+          <a:bodyPr rtlCol="0" anchor="ctr"/>
+          <a:lstStyle/>
+          <a:p>
             <a:pPr algn="ctr"/>
-            <a:r>
-              <a:rPr lang="en-US" sz="3600" dirty="0">
+            <a:endParaRPr lang="en-US"/>
+          </a:p>
+        </p:txBody>
+      </p:sp>
+      <p:sp>
+        <p:nvSpPr>
+          <p:cNvPr id="5" name="Овал 4">
+            <a:extLst>
+              <a:ext uri="{FF2B5EF4-FFF2-40B4-BE49-F238E27FC236}">
+                <a16:creationId xmlns:a16="http://schemas.microsoft.com/office/drawing/2014/main" id="{5A8B3A18-D533-389A-778C-BE1DB3BF0CF4}"/>
+              </a:ext>
+            </a:extLst>
+          </p:cNvPr>
+          <p:cNvSpPr/>
+          <p:nvPr/>
+        </p:nvSpPr>
+        <p:spPr>
+          <a:xfrm>
+            <a:off x="8315746" y="2176273"/>
+            <a:ext cx="2425004" cy="2425004"/>
+          </a:xfrm>
+          <a:prstGeom prst="ellipse">
+            <a:avLst/>
+          </a:prstGeom>
+          <a:solidFill>
+            <a:srgbClr val="FFC000"/>
+          </a:solidFill>
+          <a:ln w="15875">
+            <a:solidFill>
+              <a:schemeClr val="tx1"/>
+            </a:solidFill>
+          </a:ln>
+        </p:spPr>
+        <p:style>
+          <a:lnRef idx="2">
+            <a:schemeClr val="accent1">
+              <a:shade val="15000"/>
+            </a:schemeClr>
+          </a:lnRef>
+          <a:fillRef idx="1">
+            <a:schemeClr val="accent1"/>
+          </a:fillRef>
+          <a:effectRef idx="0">
+            <a:schemeClr val="accent1"/>
+          </a:effectRef>
+          <a:fontRef idx="minor">
+            <a:schemeClr val="lt1"/>
+          </a:fontRef>
+        </p:style>
+        <p:txBody>
+          <a:bodyPr rtlCol="0" anchor="ctr"/>
+          <a:lstStyle/>
+          <a:p>
+            <a:pPr algn="ctr"/>
+            <a:endParaRPr lang="en-US"/>
+          </a:p>
+        </p:txBody>
+      </p:sp>
+      <p:sp>
+        <p:nvSpPr>
+          <p:cNvPr id="6" name="Овал 5">
+            <a:extLst>
+              <a:ext uri="{FF2B5EF4-FFF2-40B4-BE49-F238E27FC236}">
+                <a16:creationId xmlns:a16="http://schemas.microsoft.com/office/drawing/2014/main" id="{4F50B44F-3E5E-2EC2-BD7F-E085FDF6EC0D}"/>
+              </a:ext>
+            </a:extLst>
+          </p:cNvPr>
+          <p:cNvSpPr/>
+          <p:nvPr/>
+        </p:nvSpPr>
+        <p:spPr>
+          <a:xfrm>
+            <a:off x="8783252" y="2655530"/>
+            <a:ext cx="1494697" cy="1494697"/>
+          </a:xfrm>
+          <a:prstGeom prst="ellipse">
+            <a:avLst/>
+          </a:prstGeom>
+          <a:solidFill>
+            <a:srgbClr val="FF0000"/>
+          </a:solidFill>
+          <a:ln w="15875">
+            <a:solidFill>
+              <a:schemeClr val="tx1"/>
+            </a:solidFill>
+          </a:ln>
+        </p:spPr>
+        <p:style>
+          <a:lnRef idx="2">
+            <a:schemeClr val="accent1">
+              <a:shade val="15000"/>
+            </a:schemeClr>
+          </a:lnRef>
+          <a:fillRef idx="1">
+            <a:schemeClr val="accent1"/>
+          </a:fillRef>
+          <a:effectRef idx="0">
+            <a:schemeClr val="accent1"/>
+          </a:effectRef>
+          <a:fontRef idx="minor">
+            <a:schemeClr val="lt1"/>
+          </a:fontRef>
+        </p:style>
+        <p:txBody>
+          <a:bodyPr rtlCol="0" anchor="ctr"/>
+          <a:lstStyle/>
+          <a:p>
+            <a:pPr algn="ctr"/>
+            <a:endParaRPr lang="en-US"/>
+          </a:p>
+        </p:txBody>
+      </p:sp>
+      <p:sp>
+        <p:nvSpPr>
+          <p:cNvPr id="7" name="TextBox 6">
+            <a:extLst>
+              <a:ext uri="{FF2B5EF4-FFF2-40B4-BE49-F238E27FC236}">
+                <a16:creationId xmlns:a16="http://schemas.microsoft.com/office/drawing/2014/main" id="{4CCF4CA5-26F3-414E-F632-D4842968279E}"/>
+              </a:ext>
+            </a:extLst>
+          </p:cNvPr>
+          <p:cNvSpPr txBox="1"/>
+          <p:nvPr/>
+        </p:nvSpPr>
+        <p:spPr>
+          <a:xfrm>
+            <a:off x="9315969" y="1774144"/>
+            <a:ext cx="420308" cy="400110"/>
+          </a:xfrm>
+          <a:prstGeom prst="rect">
+            <a:avLst/>
+          </a:prstGeom>
+          <a:noFill/>
+        </p:spPr>
+        <p:txBody>
+          <a:bodyPr wrap="none" rtlCol="0">
+            <a:spAutoFit/>
+          </a:bodyPr>
+          <a:lstStyle/>
+          <a:p>
+            <a:r>
+              <a:rPr lang="en-US" sz="2000" b="1" dirty="0">
+                <a:solidFill>
+                  <a:schemeClr val="bg1"/>
+                </a:solidFill>
+              </a:rPr>
+              <a:t>UI</a:t>
+            </a:r>
+          </a:p>
+        </p:txBody>
+      </p:sp>
+      <p:sp>
+        <p:nvSpPr>
+          <p:cNvPr id="8" name="TextBox 7">
+            <a:extLst>
+              <a:ext uri="{FF2B5EF4-FFF2-40B4-BE49-F238E27FC236}">
+                <a16:creationId xmlns:a16="http://schemas.microsoft.com/office/drawing/2014/main" id="{3409C21E-B184-3DE9-140A-2CE209F3F120}"/>
+              </a:ext>
+            </a:extLst>
+          </p:cNvPr>
+          <p:cNvSpPr txBox="1"/>
+          <p:nvPr/>
+        </p:nvSpPr>
+        <p:spPr>
+          <a:xfrm>
+            <a:off x="9157143" y="2207763"/>
+            <a:ext cx="737959" cy="400110"/>
+          </a:xfrm>
+          <a:prstGeom prst="rect">
+            <a:avLst/>
+          </a:prstGeom>
+          <a:noFill/>
+        </p:spPr>
+        <p:txBody>
+          <a:bodyPr wrap="none" rtlCol="0">
+            <a:spAutoFit/>
+          </a:bodyPr>
+          <a:lstStyle/>
+          <a:p>
+            <a:r>
+              <a:rPr lang="en-US" sz="2000" b="1" dirty="0">
+                <a:solidFill>
+                  <a:schemeClr val="bg1"/>
+                </a:solidFill>
+              </a:rPr>
+              <a:t>DATA</a:t>
+            </a:r>
+          </a:p>
+        </p:txBody>
+      </p:sp>
+      <p:sp>
+        <p:nvSpPr>
+          <p:cNvPr id="9" name="TextBox 8">
+            <a:extLst>
+              <a:ext uri="{FF2B5EF4-FFF2-40B4-BE49-F238E27FC236}">
+                <a16:creationId xmlns:a16="http://schemas.microsoft.com/office/drawing/2014/main" id="{6E684C2A-223D-8C57-A874-3EC24E663316}"/>
+              </a:ext>
+            </a:extLst>
+          </p:cNvPr>
+          <p:cNvSpPr txBox="1"/>
+          <p:nvPr/>
+        </p:nvSpPr>
+        <p:spPr>
+          <a:xfrm>
+            <a:off x="9157143" y="2750720"/>
+            <a:ext cx="761491" cy="400110"/>
+          </a:xfrm>
+          <a:prstGeom prst="rect">
+            <a:avLst/>
+          </a:prstGeom>
+          <a:noFill/>
+        </p:spPr>
+        <p:txBody>
+          <a:bodyPr wrap="none" rtlCol="0">
+            <a:spAutoFit/>
+          </a:bodyPr>
+          <a:lstStyle/>
+          <a:p>
+            <a:r>
+              <a:rPr lang="en-US" sz="2000" b="1" dirty="0">
+                <a:solidFill>
+                  <a:schemeClr val="bg1"/>
+                </a:solidFill>
+              </a:rPr>
+              <a:t>CORE</a:t>
+            </a:r>
+          </a:p>
+        </p:txBody>
+      </p:sp>
+      <p:pic>
+        <p:nvPicPr>
+          <p:cNvPr id="11" name="Рисунок 10">
+            <a:extLst>
+              <a:ext uri="{FF2B5EF4-FFF2-40B4-BE49-F238E27FC236}">
+                <a16:creationId xmlns:a16="http://schemas.microsoft.com/office/drawing/2014/main" id="{5A23739B-25D1-03D8-C040-D7BDCA6008E8}"/>
+              </a:ext>
+            </a:extLst>
+          </p:cNvPr>
+          <p:cNvPicPr>
+            <a:picLocks noChangeAspect="1"/>
+          </p:cNvPicPr>
+          <p:nvPr/>
+        </p:nvPicPr>
+        <p:blipFill>
+          <a:blip r:embed="rId2"/>
+          <a:stretch>
+            <a:fillRect/>
+          </a:stretch>
+        </p:blipFill>
+        <p:spPr>
+          <a:xfrm>
+            <a:off x="595851" y="1589132"/>
+            <a:ext cx="6827077" cy="3224730"/>
+          </a:xfrm>
+          <a:prstGeom prst="rect">
+            <a:avLst/>
+          </a:prstGeom>
+        </p:spPr>
+      </p:pic>
+      <p:sp>
+        <p:nvSpPr>
+          <p:cNvPr id="2" name="TextBox 1">
+            <a:extLst>
+              <a:ext uri="{FF2B5EF4-FFF2-40B4-BE49-F238E27FC236}">
+                <a16:creationId xmlns:a16="http://schemas.microsoft.com/office/drawing/2014/main" id="{81D9D759-2A57-569C-EF6B-BC8EF651FC13}"/>
+              </a:ext>
+            </a:extLst>
+          </p:cNvPr>
+          <p:cNvSpPr txBox="1"/>
+          <p:nvPr/>
+        </p:nvSpPr>
+        <p:spPr>
+          <a:xfrm>
+            <a:off x="2119269" y="5235662"/>
+            <a:ext cx="3147015" cy="276999"/>
+          </a:xfrm>
+          <a:prstGeom prst="rect">
+            <a:avLst/>
+          </a:prstGeom>
+          <a:noFill/>
+        </p:spPr>
+        <p:txBody>
+          <a:bodyPr wrap="none" rtlCol="0">
+            <a:spAutoFit/>
+          </a:bodyPr>
+          <a:lstStyle/>
+          <a:p>
+            <a:r>
+              <a:rPr lang="ru-RU" sz="1200" dirty="0">
                 <a:latin typeface="Cascadia Mono" panose="020B0609020000020004" pitchFamily="49" charset="0"/>
                 <a:cs typeface="Cascadia Mono" panose="020B0609020000020004" pitchFamily="49" charset="0"/>
               </a:rPr>
-              <a:t>*TODO:</a:t>
-            </a:r>
-            <a:r>
-              <a:rPr lang="ru-RU" sz="3600" dirty="0">
+              <a:t>Представление в виде </a:t>
+            </a:r>
+            <a:r>
+              <a:rPr lang="en-US" sz="1200" dirty="0">
                 <a:latin typeface="Cascadia Mono" panose="020B0609020000020004" pitchFamily="49" charset="0"/>
                 <a:cs typeface="Cascadia Mono" panose="020B0609020000020004" pitchFamily="49" charset="0"/>
               </a:rPr>
-              <a:t> АРХИТЕКТУРА САМОГО ПРОЕКТА, В ПРОСТОМ И СЛОЖНОМ ВИДЕ(ТИПО КЛАССЫ)*</a:t>
-            </a:r>
-            <a:endParaRPr lang="en-US" sz="3600" dirty="0">
+              <a:t>UML-</a:t>
+            </a:r>
+            <a:r>
+              <a:rPr lang="ru-RU" sz="1200" dirty="0">
+                <a:latin typeface="Cascadia Mono" panose="020B0609020000020004" pitchFamily="49" charset="0"/>
+                <a:cs typeface="Cascadia Mono" panose="020B0609020000020004" pitchFamily="49" charset="0"/>
+              </a:rPr>
+              <a:t>диаграмм</a:t>
+            </a:r>
+            <a:endParaRPr lang="en-US" sz="1200" dirty="0">
+              <a:latin typeface="Cascadia Mono" panose="020B0609020000020004" pitchFamily="49" charset="0"/>
+              <a:cs typeface="Cascadia Mono" panose="020B0609020000020004" pitchFamily="49" charset="0"/>
+            </a:endParaRPr>
+          </a:p>
+        </p:txBody>
+      </p:sp>
+      <p:sp>
+        <p:nvSpPr>
+          <p:cNvPr id="10" name="TextBox 9">
+            <a:extLst>
+              <a:ext uri="{FF2B5EF4-FFF2-40B4-BE49-F238E27FC236}">
+                <a16:creationId xmlns:a16="http://schemas.microsoft.com/office/drawing/2014/main" id="{CB5AC65C-177F-C8A6-90A0-8117CF612703}"/>
+              </a:ext>
+            </a:extLst>
+          </p:cNvPr>
+          <p:cNvSpPr txBox="1"/>
+          <p:nvPr/>
+        </p:nvSpPr>
+        <p:spPr>
+          <a:xfrm>
+            <a:off x="8233685" y="5233151"/>
+            <a:ext cx="2608406" cy="276999"/>
+          </a:xfrm>
+          <a:prstGeom prst="rect">
+            <a:avLst/>
+          </a:prstGeom>
+          <a:noFill/>
+        </p:spPr>
+        <p:txBody>
+          <a:bodyPr wrap="none" rtlCol="0">
+            <a:spAutoFit/>
+          </a:bodyPr>
+          <a:lstStyle/>
+          <a:p>
+            <a:r>
+              <a:rPr lang="ru-RU" sz="1200" dirty="0">
+                <a:latin typeface="Cascadia Mono" panose="020B0609020000020004" pitchFamily="49" charset="0"/>
+                <a:cs typeface="Cascadia Mono" panose="020B0609020000020004" pitchFamily="49" charset="0"/>
+              </a:rPr>
+              <a:t>Представление в виде «лука»</a:t>
+            </a:r>
+            <a:endParaRPr lang="en-US" sz="1200" dirty="0">
               <a:latin typeface="Cascadia Mono" panose="020B0609020000020004" pitchFamily="49" charset="0"/>
               <a:cs typeface="Cascadia Mono" panose="020B0609020000020004" pitchFamily="49" charset="0"/>
             </a:endParaRPr>
@@ -16112,7 +16511,7 @@
           <p:cNvPr id="2" name="TextBox 1">
             <a:extLst>
               <a:ext uri="{FF2B5EF4-FFF2-40B4-BE49-F238E27FC236}">
-                <a16:creationId xmlns:a16="http://schemas.microsoft.com/office/drawing/2014/main" id="{B62B1659-159E-02F5-7A78-EB12D96054FD}"/>
+                <a16:creationId xmlns:a16="http://schemas.microsoft.com/office/drawing/2014/main" id="{494BC63F-C0DC-6FD0-5C44-3E2A2A20D603}"/>
               </a:ext>
             </a:extLst>
           </p:cNvPr>
@@ -16121,8 +16520,8 @@
         </p:nvSpPr>
         <p:spPr>
           <a:xfrm>
-            <a:off x="2977923" y="2551837"/>
-            <a:ext cx="6236155" cy="1754326"/>
+            <a:off x="4019951" y="434993"/>
+            <a:ext cx="4152099" cy="461665"/>
           </a:xfrm>
           <a:prstGeom prst="rect">
             <a:avLst/>
@@ -16130,44 +16529,65 @@
           <a:noFill/>
         </p:spPr>
         <p:txBody>
-          <a:bodyPr wrap="square" rtlCol="0">
+          <a:bodyPr wrap="none" rtlCol="0">
             <a:spAutoFit/>
           </a:bodyPr>
           <a:lstStyle/>
           <a:p>
-            <a:pPr algn="ctr"/>
-            <a:r>
-              <a:rPr lang="ru-RU" sz="3600" dirty="0">
+            <a:r>
+              <a:rPr lang="ru-RU" sz="2400" b="1" dirty="0">
                 <a:latin typeface="Cascadia Mono" panose="020B0609020000020004" pitchFamily="49" charset="0"/>
                 <a:cs typeface="Cascadia Mono" panose="020B0609020000020004" pitchFamily="49" charset="0"/>
               </a:rPr>
-              <a:t>*</a:t>
-            </a:r>
-            <a:r>
-              <a:rPr lang="en-US" sz="3600" dirty="0">
-                <a:latin typeface="Cascadia Mono" panose="020B0609020000020004" pitchFamily="49" charset="0"/>
-                <a:cs typeface="Cascadia Mono" panose="020B0609020000020004" pitchFamily="49" charset="0"/>
-              </a:rPr>
-              <a:t>TODO: </a:t>
-            </a:r>
-            <a:r>
-              <a:rPr lang="ru-RU" sz="3600" dirty="0">
-                <a:latin typeface="Cascadia Mono" panose="020B0609020000020004" pitchFamily="49" charset="0"/>
-                <a:cs typeface="Cascadia Mono" panose="020B0609020000020004" pitchFamily="49" charset="0"/>
-              </a:rPr>
-              <a:t>БЛОК РЕАЛИЗАЦИИ ПРОЕКТА И РАЗБОРА АЛГОВ И СТРУКТУР*</a:t>
-            </a:r>
-            <a:endParaRPr lang="en-US" sz="3600" dirty="0">
+              <a:t>Архитектура приложения</a:t>
+            </a:r>
+            <a:endParaRPr lang="en-US" sz="2400" b="1" dirty="0">
               <a:latin typeface="Cascadia Mono" panose="020B0609020000020004" pitchFamily="49" charset="0"/>
               <a:cs typeface="Cascadia Mono" panose="020B0609020000020004" pitchFamily="49" charset="0"/>
             </a:endParaRPr>
+          </a:p>
+        </p:txBody>
+      </p:sp>
+      <p:sp>
+        <p:nvSpPr>
+          <p:cNvPr id="3" name="TextBox 2">
+            <a:extLst>
+              <a:ext uri="{FF2B5EF4-FFF2-40B4-BE49-F238E27FC236}">
+                <a16:creationId xmlns:a16="http://schemas.microsoft.com/office/drawing/2014/main" id="{00200140-D865-D9E9-9446-BDF5B40F7B6D}"/>
+              </a:ext>
+            </a:extLst>
+          </p:cNvPr>
+          <p:cNvSpPr txBox="1"/>
+          <p:nvPr/>
+        </p:nvSpPr>
+        <p:spPr>
+          <a:xfrm>
+            <a:off x="5036864" y="1033272"/>
+            <a:ext cx="2118272" cy="369332"/>
+          </a:xfrm>
+          <a:prstGeom prst="rect">
+            <a:avLst/>
+          </a:prstGeom>
+          <a:noFill/>
+        </p:spPr>
+        <p:txBody>
+          <a:bodyPr wrap="none" rtlCol="0">
+            <a:spAutoFit/>
+          </a:bodyPr>
+          <a:lstStyle/>
+          <a:p>
+            <a:r>
+              <a:rPr lang="ru-RU" dirty="0"/>
+              <a:t>Диаграмма классов</a:t>
+            </a:r>
+            <a:endParaRPr lang="en-US" dirty="0"/>
           </a:p>
         </p:txBody>
       </p:sp>
     </p:spTree>
     <p:extLst>
       <p:ext uri="{BB962C8B-B14F-4D97-AF65-F5344CB8AC3E}">
-        <p14:creationId xmlns:p14="http://schemas.microsoft.com/office/powerpoint/2010/main" val="1761257975"/>
+        <p14:creationId xmlns:p14="http://schemas.microsoft.com/office/powerpoint/2010/main" val="3259445902"/>
       </p:ext>
     </p:extLst>
   </p:cSld>
